--- a/Lectures/11-model-selection-and-validation-part-2.pptx
+++ b/Lectures/11-model-selection-and-validation-part-2.pptx
@@ -13068,7 +13068,7 @@
           <a:p>
             <a:r>
               <a:rPr lang="en-US" dirty="0"/>
-              <a:t>Project Assignment – Triage Setup due Monday – see template slides and canvas assignment</a:t>
+              <a:t>Project Assignment – Triage cohort and labels due Monday – see template slides and canvas assignment</a:t>
             </a:r>
           </a:p>
           <a:p>
@@ -20171,7 +20171,7 @@
           <a:p>
             <a:r>
               <a:rPr lang="en-US" dirty="0"/>
-              <a:t>Project Assignment – Triage Setup due Monday – see template slides and canvas assignment</a:t>
+              <a:t>Project Assignment – Triage Cohort and Labels due Monday – see template slides and canvas assignment</a:t>
             </a:r>
           </a:p>
           <a:p>
@@ -20245,7 +20245,15 @@
           <a:p>
             <a:r>
               <a:rPr lang="en-US" dirty="0"/>
-              <a:t>Group Meetings – Wednesdays Going Forward</a:t>
+              <a:t>Group </a:t>
+            </a:r>
+            <a:r>
+              <a:rPr lang="en-US" dirty="0" err="1"/>
+              <a:t>Checkins</a:t>
+            </a:r>
+            <a:r>
+              <a:rPr lang="en-US" dirty="0"/>
+              <a:t> – Wednesdays Going Forward</a:t>
             </a:r>
           </a:p>
         </p:txBody>
@@ -20384,6 +20392,13 @@
             <a:r>
               <a:rPr lang="en-US" dirty="0"/>
               <a:t>What you should be building this week</a:t>
+            </a:r>
+          </a:p>
+          <a:p>
+            <a:pPr lvl="1"/>
+            <a:r>
+              <a:rPr lang="en-US" dirty="0"/>
+              <a:t>Getting comfortable running triage and looking at what it produces</a:t>
             </a:r>
           </a:p>
           <a:p>
